--- a/RBCCM Digital Efficiencies.pptx
+++ b/RBCCM Digital Efficiencies.pptx
@@ -12,9 +12,10 @@
     <p:sldId id="260" r:id="rId6"/>
     <p:sldId id="261" r:id="rId7"/>
     <p:sldId id="262" r:id="rId8"/>
+    <p:sldId id="263" r:id="rId9"/>
   </p:sldIdLst>
   <p:notesMasterIdLst>
-    <p:notesMasterId r:id="rId9"/>
+    <p:notesMasterId r:id="rId10"/>
   </p:notesMasterIdLst>
   <p:sldSz cx="12192000" cy="6858000"/>
   <p:notesSz cx="6858000" cy="12192000"/>
@@ -684,7 +685,7 @@
           <a:p>
             <a:r>
               <a:rPr lang="en-US" dirty="0"/>
-              <a:t>Candidate 1: GitHub as source of truth. Code lives in a real repo. TeamSite stays the deploy target. What it fixes: No history, no rollback, no code review, no audit trail on incidents. Cost to try: A repo and a workflow agreement. Nothing to install on TeamSite. TeamSite impact: Zero. TeamSite doesn't have to change.</a:t>
+              <a:t>Candidate 1: GitHub as source of truth. Component code (JS, CSS, XSL, XML) lives in one clean, accurate, documented repo. TeamSite stays the deploy target. What it fixes: History, rollback and review exist today, but loosely (TeamSite versions, local copies, memory). The repo gives one clean place to see what changed, when and why. Cost to try: A repo and a workflow agreement. Still no CI/CD into TeamSite, but code is checked in the repo before anything is uploaded, so "what happened?" has an answer. TeamSite impact: Zero. Deploys stay manual for now, but the repo is the record of what should be live.</a:t>
             </a:r>
             <a:endParaRPr lang="en-US" dirty="0"/>
           </a:p>
@@ -772,7 +773,7 @@
           <a:p>
             <a:r>
               <a:rPr lang="en-US" dirty="0"/>
-              <a:t>Candidate 2: Local npm build + one-command deploy. SCSS, lint, bundle, and SFTP push, all scripted. Every push logged. What it fixes: "Download, edit, upload" tax. Manual errors. "Who changed what?" incidents. Cost to try: One-time script to write. Runs on any dev machine. TeamSite impact: Zero. Same files land at the same paths, just faster and audited.</a:t>
+              <a:t>Candidate 2: Local npm build that validates the repo. One command lints and checks every component's JS, CSS, XSL and XML before anything goes up. What it fixes: Broken XSL, typos and bad markup found on the live site instead of before upload. Cost to try: One-time script to write. Runs on any dev machine. TeamSite impact: Zero. It only checks the files; uploading to TeamSite is unchanged.</a:t>
             </a:r>
             <a:endParaRPr lang="en-US" dirty="0"/>
           </a:p>
@@ -860,7 +861,7 @@
           <a:p>
             <a:r>
               <a:rPr lang="en-US" dirty="0"/>
-              <a:t>Candidate 3: A new modern component library. A browsable catalog of every rbccm-* component with all its variations. What it fixes: The three-carousels pattern. Marketing asking for what already exists. Cost to try: Effort TBD. Delivers visual variations of every component in one place. TeamSite impact: Zero. Lives outside TeamSite as a static reference.</a:t>
+              <a:t>Candidate 3: An rbccm-* component library. Every Block Element Modifier (BEM) named rbccm-* component with all its variations. A local npm build produces a dev page to check the output is what's expected: variations, FPO content, etc. What it fixes: The three-carousels pattern. Marketing asking for what already exists. Surprises after publishing. Cost to try: Effort TBD. Builds on the component folders and local tests that already exist. TeamSite impact: Zero. Runs locally, outside TeamSite.</a:t>
             </a:r>
             <a:endParaRPr lang="en-US" dirty="0"/>
           </a:p>
@@ -1036,7 +1037,7 @@
           <a:p>
             <a:r>
               <a:rPr lang="en-US" dirty="0"/>
-              <a:t>Candidate 5: Standardized local preview environment. A shared local-test pattern matching TeamSite's runtime. Anyone can iterate offline. What it fixes: Edits in prod. Cost to try: Documenting and templating what already works on some components. TeamSite impact: Zero. Runs locally. Only the final artifact touches TeamSite.</a:t>
+              <a:t>Candidate 5: Localized page preview. Full pages previewed locally from the #3 component library, matching TeamSite's runtime. Anyone can iterate offline. What it fixes: Edits in prod. Cost to try: Comes out of #3: page templates that assemble library components. TeamSite impact: Zero. Runs locally. Only the final files touch TeamSite.</a:t>
             </a:r>
             <a:endParaRPr lang="en-US" dirty="0"/>
           </a:p>
@@ -1060,6 +1061,94 @@
             <a:fld id="{F7021451-1387-4CA6-816F-3879F97B5CBC}" type="slidenum">
               <a:rPr lang="en-US"/>
               <a:t>7</a:t>
+            </a:fld>
+            <a:endParaRPr lang="en-US"/>
+          </a:p>
+        </p:txBody>
+      </p:sp>
+    </p:spTree>
+    <p:extLst>
+      <p:ext uri="{BB962C8B-B14F-4D97-AF65-F5344CB8AC3E}">
+        <p14:creationId xmlns:p14="http://schemas.microsoft.com/office/powerpoint/2010/main" val="1024086991"/>
+      </p:ext>
+    </p:extLst>
+  </p:cSld>
+  <p:clrMapOvr>
+    <a:masterClrMapping/>
+  </p:clrMapOvr>
+</p:notes>
+</file>
+
+<file path=ppt/notesSlides/notesSlide8.xml><?xml version="1.0" encoding="utf-8"?>
+<p:notes xmlns:a="http://schemas.openxmlformats.org/drawingml/2006/main" xmlns:r="http://schemas.openxmlformats.org/officeDocument/2006/relationships" xmlns:p="http://schemas.openxmlformats.org/presentationml/2006/main">
+  <p:cSld>
+    <p:spTree>
+      <p:nvGrpSpPr>
+        <p:cNvPr id="1" name=""/>
+        <p:cNvGrpSpPr/>
+        <p:nvPr/>
+      </p:nvGrpSpPr>
+      <p:grpSpPr>
+        <a:xfrm>
+          <a:off x="0" y="0"/>
+          <a:ext cx="0" cy="0"/>
+          <a:chOff x="0" y="0"/>
+          <a:chExt cx="0" cy="0"/>
+        </a:xfrm>
+      </p:grpSpPr>
+      <p:sp>
+        <p:nvSpPr>
+          <p:cNvPr id="2" name="Slide Image Placeholder 1"/>
+          <p:cNvSpPr>
+            <a:spLocks noGrp="1" noRot="1" noChangeAspect="1"/>
+          </p:cNvSpPr>
+          <p:nvPr>
+            <p:ph type="sldImg"/>
+          </p:nvPr>
+        </p:nvSpPr>
+        <p:spPr/>
+      </p:sp>
+      <p:sp>
+        <p:nvSpPr>
+          <p:cNvPr id="3" name="Notes Placeholder 2"/>
+          <p:cNvSpPr>
+            <a:spLocks noGrp="1"/>
+          </p:cNvSpPr>
+          <p:nvPr>
+            <p:ph type="body" idx="1"/>
+          </p:nvPr>
+        </p:nvSpPr>
+        <p:spPr/>
+        <p:txBody>
+          <a:bodyPr/>
+          <a:lstStyle/>
+          <a:p>
+            <a:r>
+              <a:rPr lang="en-US" dirty="0"/>
+              <a:t>Candidate 6: No reliance on Bootstrap. Our design system, 1:1 with the Figma expectation. Every component styled in its own SCSS instead of loading a whole library for utility classes. Atomic design principles, 100% accurate. What it fixes: Every page loading all of Bootstrap for a handful of utilities. Fighting framework defaults to match the design. Cost to try: In progress now. New components already ship their own CSS; older pages move over as they're rebuilt. Pairs with #4. TeamSite impact: Zero. Future-proofs the rendered output: if the CMS changes, only the templates (PHP, React, etc.) need updating, not the styles.</a:t>
+            </a:r>
+            <a:endParaRPr lang="en-US" dirty="0"/>
+          </a:p>
+        </p:txBody>
+      </p:sp>
+      <p:sp>
+        <p:nvSpPr>
+          <p:cNvPr id="4" name="Slide Number Placeholder 3"/>
+          <p:cNvSpPr>
+            <a:spLocks noGrp="1"/>
+          </p:cNvSpPr>
+          <p:nvPr>
+            <p:ph type="sldNum" sz="quarter" idx="10"/>
+          </p:nvPr>
+        </p:nvSpPr>
+        <p:spPr/>
+        <p:txBody>
+          <a:bodyPr/>
+          <a:lstStyle/>
+          <a:p>
+            <a:fld id="{F7021451-1387-4CA6-816F-3879F97B5CBC}" type="slidenum">
+              <a:rPr lang="en-US"/>
+              <a:t>8</a:t>
             </a:fld>
             <a:endParaRPr lang="en-US"/>
           </a:p>
@@ -1411,47 +1500,7 @@
       </p:grpSpPr>
       <p:sp>
         <p:nvSpPr>
-          <p:cNvPr id="2" name="Shape 0"/>
-          <p:cNvSpPr/>
-          <p:nvPr/>
-        </p:nvSpPr>
-        <p:spPr>
-          <a:xfrm>
-            <a:off x="9601200" y="548640"/>
-            <a:ext cx="2103120" cy="2103120"/>
-          </a:xfrm>
-          <a:prstGeom prst="ellipse">
-            <a:avLst/>
-          </a:prstGeom>
-          <a:solidFill>
-            <a:srgbClr val="FFC72C"/>
-          </a:solidFill>
-          <a:ln/>
-        </p:spPr>
-      </p:sp>
-      <p:sp>
-        <p:nvSpPr>
-          <p:cNvPr id="3" name="Shape 1"/>
-          <p:cNvSpPr/>
-          <p:nvPr/>
-        </p:nvSpPr>
-        <p:spPr>
-          <a:xfrm>
-            <a:off x="9966960" y="914400"/>
-            <a:ext cx="1371600" cy="1371600"/>
-          </a:xfrm>
-          <a:prstGeom prst="ellipse">
-            <a:avLst/>
-          </a:prstGeom>
-          <a:solidFill>
-            <a:srgbClr val="003168"/>
-          </a:solidFill>
-          <a:ln/>
-        </p:spPr>
-      </p:sp>
-      <p:sp>
-        <p:nvSpPr>
-          <p:cNvPr id="4" name="Text 2"/>
+          <p:cNvPr id="2" name="Text 0"/>
           <p:cNvSpPr txBox="1"/>
           <p:nvPr/>
         </p:nvSpPr>
@@ -1482,7 +1531,7 @@
                 <a:ea typeface="Calibri" pitchFamily="34" charset="-122"/>
                 <a:cs typeface="Calibri" pitchFamily="34" charset="-120"/>
               </a:rPr>
-              <a:t>EFFICIENCY CANDIDATES</a:t>
+              <a:t>EFFICIENCY / PROCESS CANDIDATES</a:t>
             </a:r>
             <a:endParaRPr lang="en-US" sz="1200" dirty="0"/>
           </a:p>
@@ -1490,7 +1539,7 @@
       </p:sp>
       <p:sp>
         <p:nvSpPr>
-          <p:cNvPr id="5" name="Text 3"/>
+          <p:cNvPr id="3" name="Text 1"/>
           <p:cNvSpPr txBox="1"/>
           <p:nvPr/>
         </p:nvSpPr>
@@ -1546,7 +1595,7 @@
       </p:sp>
       <p:sp>
         <p:nvSpPr>
-          <p:cNvPr id="6" name="Text 4"/>
+          <p:cNvPr id="4" name="Text 2"/>
           <p:cNvSpPr txBox="1"/>
           <p:nvPr/>
         </p:nvSpPr>
@@ -1624,7 +1673,7 @@
         <p:spPr>
           <a:xfrm>
             <a:off x="548640" y="320040"/>
-            <a:ext cx="4572000" cy="274320"/>
+            <a:ext cx="7315200" cy="274320"/>
           </a:xfrm>
           <a:prstGeom prst="rect">
             <a:avLst/>
@@ -1648,7 +1697,7 @@
                 <a:ea typeface="Calibri" pitchFamily="34" charset="-122"/>
                 <a:cs typeface="Calibri" pitchFamily="34" charset="-120"/>
               </a:rPr>
-              <a:t>RBCCM DIGITAL / EFFICIENCIES</a:t>
+              <a:t>RBCCM DIGITAL / EFFICIENCIES / PROCESSES</a:t>
             </a:r>
             <a:endParaRPr lang="en-US" sz="1000" dirty="0"/>
           </a:p>
@@ -1888,7 +1937,7 @@
                 <a:ea typeface="Calibri" pitchFamily="34" charset="-122"/>
                 <a:cs typeface="Calibri" pitchFamily="34" charset="-120"/>
               </a:rPr>
-              <a:t>Code lives in a real repo. TeamSite stays the deploy target.</a:t>
+              <a:t>Component code (JS, CSS, XSL, XML) lives in one clean, accurate, documented repo. TeamSite stays the deploy target.</a:t>
             </a:r>
             <a:endParaRPr lang="en-US" sz="1100" dirty="0"/>
           </a:p>
@@ -2011,7 +2060,7 @@
                 <a:ea typeface="Cambria" pitchFamily="34" charset="-122"/>
                 <a:cs typeface="Cambria" pitchFamily="34" charset="-120"/>
               </a:rPr>
-              <a:t>Local npm build + one-command deploy.</a:t>
+              <a:t>Local npm build that validates the repo.</a:t>
             </a:r>
             <a:endParaRPr lang="en-US" sz="1300" dirty="0"/>
           </a:p>
@@ -2050,7 +2099,7 @@
                 <a:ea typeface="Calibri" pitchFamily="34" charset="-122"/>
                 <a:cs typeface="Calibri" pitchFamily="34" charset="-120"/>
               </a:rPr>
-              <a:t>SCSS, lint, bundle, and SFTP push, all scripted. Every push logged.</a:t>
+              <a:t>One command lints and checks every component's JS, CSS, XSL and XML before anything goes up.</a:t>
             </a:r>
             <a:endParaRPr lang="en-US" sz="1100" dirty="0"/>
           </a:p>
@@ -2173,7 +2222,7 @@
                 <a:ea typeface="Cambria" pitchFamily="34" charset="-122"/>
                 <a:cs typeface="Cambria" pitchFamily="34" charset="-120"/>
               </a:rPr>
-              <a:t>A new modern component library.</a:t>
+              <a:t>An rbccm-* component library.</a:t>
             </a:r>
             <a:endParaRPr lang="en-US" sz="1300" dirty="0"/>
           </a:p>
@@ -2212,7 +2261,7 @@
                 <a:ea typeface="Calibri" pitchFamily="34" charset="-122"/>
                 <a:cs typeface="Calibri" pitchFamily="34" charset="-120"/>
               </a:rPr>
-              <a:t>A browsable catalog of every rbccm-* component with all its variations.</a:t>
+              <a:t>Every Block Element Modifier (BEM) named rbccm-* component with all its variations. A local npm build produces a dev page to check the output is what's expected: variations, FPO content, etc.</a:t>
             </a:r>
             <a:endParaRPr lang="en-US" sz="1100" dirty="0"/>
           </a:p>
@@ -2226,7 +2275,7 @@
         </p:nvSpPr>
         <p:spPr>
           <a:xfrm>
-            <a:off x="2415388" y="4389120"/>
+            <a:off x="540868" y="4389120"/>
             <a:ext cx="3611880" cy="1828800"/>
           </a:xfrm>
           <a:prstGeom prst="rect">
@@ -2251,7 +2300,7 @@
         </p:nvSpPr>
         <p:spPr>
           <a:xfrm>
-            <a:off x="2643988" y="4617720"/>
+            <a:off x="769468" y="4617720"/>
             <a:ext cx="457200" cy="457200"/>
           </a:xfrm>
           <a:prstGeom prst="ellipse">
@@ -2271,7 +2320,7 @@
         </p:nvSpPr>
         <p:spPr>
           <a:xfrm>
-            <a:off x="2643988" y="4617720"/>
+            <a:off x="769468" y="4617720"/>
             <a:ext cx="457200" cy="457200"/>
           </a:xfrm>
           <a:prstGeom prst="rect">
@@ -2310,7 +2359,7 @@
         </p:nvSpPr>
         <p:spPr>
           <a:xfrm>
-            <a:off x="3192628" y="4617720"/>
+            <a:off x="1318108" y="4617720"/>
             <a:ext cx="2606040" cy="457200"/>
           </a:xfrm>
           <a:prstGeom prst="rect">
@@ -2349,7 +2398,7 @@
         </p:nvSpPr>
         <p:spPr>
           <a:xfrm>
-            <a:off x="2643988" y="5166360"/>
+            <a:off x="769468" y="5166360"/>
             <a:ext cx="3154680" cy="914400"/>
           </a:xfrm>
           <a:prstGeom prst="rect">
@@ -2388,7 +2437,7 @@
         </p:nvSpPr>
         <p:spPr>
           <a:xfrm>
-            <a:off x="6164428" y="4389120"/>
+            <a:off x="4289908" y="4389120"/>
             <a:ext cx="3611880" cy="1828800"/>
           </a:xfrm>
           <a:prstGeom prst="rect">
@@ -2413,7 +2462,7 @@
         </p:nvSpPr>
         <p:spPr>
           <a:xfrm>
-            <a:off x="6393028" y="4617720"/>
+            <a:off x="4518508" y="4617720"/>
             <a:ext cx="457200" cy="457200"/>
           </a:xfrm>
           <a:prstGeom prst="ellipse">
@@ -2433,7 +2482,7 @@
         </p:nvSpPr>
         <p:spPr>
           <a:xfrm>
-            <a:off x="6393028" y="4617720"/>
+            <a:off x="4518508" y="4617720"/>
             <a:ext cx="457200" cy="457200"/>
           </a:xfrm>
           <a:prstGeom prst="rect">
@@ -2472,7 +2521,7 @@
         </p:nvSpPr>
         <p:spPr>
           <a:xfrm>
-            <a:off x="6941668" y="4617720"/>
+            <a:off x="5067148" y="4617720"/>
             <a:ext cx="2606040" cy="457200"/>
           </a:xfrm>
           <a:prstGeom prst="rect">
@@ -2497,7 +2546,7 @@
                 <a:ea typeface="Cambria" pitchFamily="34" charset="-122"/>
                 <a:cs typeface="Cambria" pitchFamily="34" charset="-120"/>
               </a:rPr>
-              <a:t>Standardized local preview environment.</a:t>
+              <a:t>Localized page preview.</a:t>
             </a:r>
             <a:endParaRPr lang="en-US" sz="1300" dirty="0"/>
           </a:p>
@@ -2511,7 +2560,7 @@
         </p:nvSpPr>
         <p:spPr>
           <a:xfrm>
-            <a:off x="6393028" y="5166360"/>
+            <a:off x="4518508" y="5166360"/>
             <a:ext cx="3154680" cy="914400"/>
           </a:xfrm>
           <a:prstGeom prst="rect">
@@ -2536,7 +2585,7 @@
                 <a:ea typeface="Calibri" pitchFamily="34" charset="-122"/>
                 <a:cs typeface="Calibri" pitchFamily="34" charset="-120"/>
               </a:rPr>
-              <a:t>A shared local-test pattern matching TeamSite's runtime. Anyone can iterate offline.</a:t>
+              <a:t>Full pages previewed locally from the #3 component library, matching TeamSite's runtime. Anyone can iterate offline.</a:t>
             </a:r>
             <a:endParaRPr lang="en-US" sz="1100" dirty="0"/>
           </a:p>
@@ -2550,7 +2599,32 @@
         </p:nvSpPr>
         <p:spPr>
           <a:xfrm>
-            <a:off x="11338560" y="6355080"/>
+            <a:off x="8038948" y="4389120"/>
+            <a:ext cx="3611880" cy="1828800"/>
+          </a:xfrm>
+          <a:prstGeom prst="rect">
+            <a:avLst/>
+          </a:prstGeom>
+          <a:solidFill>
+            <a:srgbClr val="F9FAFB"/>
+          </a:solidFill>
+          <a:ln w="12700">
+            <a:solidFill>
+              <a:srgbClr val="E5E7EB"/>
+            </a:solidFill>
+            <a:prstDash val="solid"/>
+          </a:ln>
+        </p:spPr>
+      </p:sp>
+      <p:sp>
+        <p:nvSpPr>
+          <p:cNvPr id="31" name="Shape 29"/>
+          <p:cNvSpPr/>
+          <p:nvPr/>
+        </p:nvSpPr>
+        <p:spPr>
+          <a:xfrm>
+            <a:off x="8267548" y="4617720"/>
             <a:ext cx="457200" cy="457200"/>
           </a:xfrm>
           <a:prstGeom prst="ellipse">
@@ -2564,13 +2638,13 @@
       </p:sp>
       <p:sp>
         <p:nvSpPr>
-          <p:cNvPr id="31" name="Text 29"/>
-          <p:cNvSpPr txBox="1"/>
-          <p:nvPr/>
-        </p:nvSpPr>
-        <p:spPr>
-          <a:xfrm>
-            <a:off x="11338560" y="6355080"/>
+          <p:cNvPr id="32" name="Text 30"/>
+          <p:cNvSpPr txBox="1"/>
+          <p:nvPr/>
+        </p:nvSpPr>
+        <p:spPr>
+          <a:xfrm>
+            <a:off x="8267548" y="4617720"/>
             <a:ext cx="457200" cy="457200"/>
           </a:xfrm>
           <a:prstGeom prst="rect">
@@ -2587,30 +2661,108 @@
               <a:buNone/>
             </a:pPr>
             <a:r>
-              <a:rPr lang="en-US" sz="1200" b="1" dirty="0">
+              <a:rPr lang="en-US" sz="1400" b="1" dirty="0">
                 <a:solidFill>
                   <a:srgbClr val="003168"/>
+                </a:solidFill>
+                <a:latin typeface="Cambria" pitchFamily="34" charset="0"/>
+                <a:ea typeface="Cambria" pitchFamily="34" charset="-122"/>
+                <a:cs typeface="Cambria" pitchFamily="34" charset="-120"/>
+              </a:rPr>
+              <a:t>6</a:t>
+            </a:r>
+            <a:endParaRPr lang="en-US" sz="1400" dirty="0"/>
+          </a:p>
+        </p:txBody>
+      </p:sp>
+      <p:sp>
+        <p:nvSpPr>
+          <p:cNvPr id="33" name="Text 31"/>
+          <p:cNvSpPr txBox="1"/>
+          <p:nvPr/>
+        </p:nvSpPr>
+        <p:spPr>
+          <a:xfrm>
+            <a:off x="8816188" y="4617720"/>
+            <a:ext cx="2606040" cy="457200"/>
+          </a:xfrm>
+          <a:prstGeom prst="rect">
+            <a:avLst/>
+          </a:prstGeom>
+          <a:noFill/>
+          <a:ln/>
+        </p:spPr>
+        <p:txBody>
+          <a:bodyPr wrap="square" lIns="0" tIns="0" rIns="0" bIns="0" rtlCol="0" anchor="ctr"/>
+          <a:lstStyle/>
+          <a:p>
+            <a:pPr indent="0" marL="0">
+              <a:buNone/>
+            </a:pPr>
+            <a:r>
+              <a:rPr lang="en-US" sz="1300" b="1" dirty="0">
+                <a:solidFill>
+                  <a:srgbClr val="003168"/>
+                </a:solidFill>
+                <a:latin typeface="Cambria" pitchFamily="34" charset="0"/>
+                <a:ea typeface="Cambria" pitchFamily="34" charset="-122"/>
+                <a:cs typeface="Cambria" pitchFamily="34" charset="-120"/>
+              </a:rPr>
+              <a:t>No reliance on Bootstrap.</a:t>
+            </a:r>
+            <a:endParaRPr lang="en-US" sz="1300" dirty="0"/>
+          </a:p>
+        </p:txBody>
+      </p:sp>
+      <p:sp>
+        <p:nvSpPr>
+          <p:cNvPr id="34" name="Text 32"/>
+          <p:cNvSpPr txBox="1"/>
+          <p:nvPr/>
+        </p:nvSpPr>
+        <p:spPr>
+          <a:xfrm>
+            <a:off x="8267548" y="5166360"/>
+            <a:ext cx="3154680" cy="914400"/>
+          </a:xfrm>
+          <a:prstGeom prst="rect">
+            <a:avLst/>
+          </a:prstGeom>
+          <a:noFill/>
+          <a:ln/>
+        </p:spPr>
+        <p:txBody>
+          <a:bodyPr wrap="square" lIns="0" tIns="0" rIns="0" bIns="0" rtlCol="0" anchor="t"/>
+          <a:lstStyle/>
+          <a:p>
+            <a:pPr indent="0" marL="0">
+              <a:buNone/>
+            </a:pPr>
+            <a:r>
+              <a:rPr lang="en-US" sz="1100" dirty="0">
+                <a:solidFill>
+                  <a:srgbClr val="1A1A1A"/>
                 </a:solidFill>
                 <a:latin typeface="Calibri" pitchFamily="34" charset="0"/>
                 <a:ea typeface="Calibri" pitchFamily="34" charset="-122"/>
                 <a:cs typeface="Calibri" pitchFamily="34" charset="-120"/>
               </a:rPr>
-              <a:t>2</a:t>
-            </a:r>
-            <a:endParaRPr lang="en-US" sz="1200" dirty="0"/>
-          </a:p>
-        </p:txBody>
-      </p:sp>
-      <p:sp>
-        <p:nvSpPr>
-          <p:cNvPr id="32" name="Text 30"/>
-          <p:cNvSpPr txBox="1"/>
-          <p:nvPr/>
-        </p:nvSpPr>
-        <p:spPr>
-          <a:xfrm>
-            <a:off x="10698480" y="6391656"/>
-            <a:ext cx="548640" cy="365760"/>
+              <a:t>Our design system, 1:1 with the Figma expectation. Every component styled in its own SCSS instead of loading a whole library for utility classes. Atomic design principles, 100% accurate.</a:t>
+            </a:r>
+            <a:endParaRPr lang="en-US" sz="1100" dirty="0"/>
+          </a:p>
+        </p:txBody>
+      </p:sp>
+      <p:sp>
+        <p:nvSpPr>
+          <p:cNvPr id="35" name="Text 33"/>
+          <p:cNvSpPr txBox="1"/>
+          <p:nvPr/>
+        </p:nvSpPr>
+        <p:spPr>
+          <a:xfrm>
+            <a:off x="10424160" y="6355080"/>
+            <a:ext cx="1371600" cy="365760"/>
           </a:xfrm>
           <a:prstGeom prst="rect">
             <a:avLst/>
@@ -2626,17 +2778,17 @@
               <a:buNone/>
             </a:pPr>
             <a:r>
-              <a:rPr lang="en-US" sz="1000" dirty="0">
-                <a:solidFill>
-                  <a:srgbClr val="6B7280"/>
+              <a:rPr lang="en-US" sz="1100" b="1" dirty="0">
+                <a:solidFill>
+                  <a:srgbClr val="003168"/>
                 </a:solidFill>
                 <a:latin typeface="Calibri" pitchFamily="34" charset="0"/>
                 <a:ea typeface="Calibri" pitchFamily="34" charset="-122"/>
                 <a:cs typeface="Calibri" pitchFamily="34" charset="-120"/>
               </a:rPr>
-              <a:t>/ 7</a:t>
-            </a:r>
-            <a:endParaRPr lang="en-US" sz="1000" dirty="0"/>
+              <a:t>2 / 8</a:t>
+            </a:r>
+            <a:endParaRPr lang="en-US" sz="1100" dirty="0"/>
           </a:p>
         </p:txBody>
       </p:sp>
@@ -2681,7 +2833,7 @@
         <p:spPr>
           <a:xfrm>
             <a:off x="548640" y="320040"/>
-            <a:ext cx="4572000" cy="274320"/>
+            <a:ext cx="7315200" cy="274320"/>
           </a:xfrm>
           <a:prstGeom prst="rect">
             <a:avLst/>
@@ -2705,7 +2857,7 @@
                 <a:ea typeface="Calibri" pitchFamily="34" charset="-122"/>
                 <a:cs typeface="Calibri" pitchFamily="34" charset="-120"/>
               </a:rPr>
-              <a:t>RBCCM DIGITAL / EFFICIENCIES</a:t>
+              <a:t>RBCCM DIGITAL / EFFICIENCIES / PROCESSES</a:t>
             </a:r>
             <a:endParaRPr lang="en-US" sz="1000" dirty="0"/>
           </a:p>
@@ -2842,7 +2994,7 @@
                 <a:ea typeface="Calibri" pitchFamily="34" charset="-122"/>
                 <a:cs typeface="Calibri" pitchFamily="34" charset="-120"/>
               </a:rPr>
-              <a:t>Code lives in a real repo. TeamSite stays the deploy target.</a:t>
+              <a:t>Component code (JS, CSS, XSL, XML) lives in one clean, accurate, documented repo. TeamSite stays the deploy target.</a:t>
             </a:r>
             <a:endParaRPr lang="en-US" sz="1800" dirty="0"/>
           </a:p>
@@ -2945,7 +3097,7 @@
                 <a:ea typeface="Calibri" pitchFamily="34" charset="-122"/>
                 <a:cs typeface="Calibri" pitchFamily="34" charset="-120"/>
               </a:rPr>
-              <a:t>No history, no rollback, no code review, no audit trail on incidents.</a:t>
+              <a:t>History, rollback and review exist today, but loosely (TeamSite versions, local copies, memory). The repo gives one clean place to see what changed, when and why.</a:t>
             </a:r>
             <a:endParaRPr lang="en-US" sz="1400" dirty="0"/>
           </a:p>
@@ -3048,7 +3200,7 @@
                 <a:ea typeface="Calibri" pitchFamily="34" charset="-122"/>
                 <a:cs typeface="Calibri" pitchFamily="34" charset="-120"/>
               </a:rPr>
-              <a:t>A repo and a workflow agreement. Nothing to install on TeamSite.</a:t>
+              <a:t>A repo and a workflow agreement. Still no CI/CD into TeamSite, but code is checked in the repo before anything is uploaded, so "what happened?" has an answer.</a:t>
             </a:r>
             <a:endParaRPr lang="en-US" sz="1400" dirty="0"/>
           </a:p>
@@ -3151,7 +3303,7 @@
                 <a:ea typeface="Calibri" pitchFamily="34" charset="-122"/>
                 <a:cs typeface="Calibri" pitchFamily="34" charset="-120"/>
               </a:rPr>
-              <a:t>Zero. TeamSite doesn't have to change.</a:t>
+              <a:t>Zero. Deploys stay manual for now, but the repo is the record of what should be live.</a:t>
             </a:r>
             <a:endParaRPr lang="en-US" sz="1400" dirty="0"/>
           </a:p>
@@ -3159,50 +3311,30 @@
       </p:sp>
       <p:sp>
         <p:nvSpPr>
-          <p:cNvPr id="16" name="Shape 14"/>
-          <p:cNvSpPr/>
-          <p:nvPr/>
-        </p:nvSpPr>
-        <p:spPr>
-          <a:xfrm>
-            <a:off x="11338560" y="6355080"/>
-            <a:ext cx="457200" cy="457200"/>
-          </a:xfrm>
-          <a:prstGeom prst="ellipse">
-            <a:avLst/>
-          </a:prstGeom>
-          <a:solidFill>
-            <a:srgbClr val="FFC72C"/>
-          </a:solidFill>
-          <a:ln/>
-        </p:spPr>
-      </p:sp>
-      <p:sp>
-        <p:nvSpPr>
-          <p:cNvPr id="17" name="Text 15"/>
-          <p:cNvSpPr txBox="1"/>
-          <p:nvPr/>
-        </p:nvSpPr>
-        <p:spPr>
-          <a:xfrm>
-            <a:off x="11338560" y="6355080"/>
-            <a:ext cx="457200" cy="457200"/>
-          </a:xfrm>
-          <a:prstGeom prst="rect">
-            <a:avLst/>
-          </a:prstGeom>
-          <a:noFill/>
-          <a:ln/>
-        </p:spPr>
-        <p:txBody>
-          <a:bodyPr wrap="square" lIns="0" tIns="0" rIns="0" bIns="0" rtlCol="0" anchor="ctr"/>
-          <a:lstStyle/>
-          <a:p>
-            <a:pPr algn="ctr" indent="0" marL="0">
-              <a:buNone/>
-            </a:pPr>
-            <a:r>
-              <a:rPr lang="en-US" sz="1200" b="1" dirty="0">
+          <p:cNvPr id="16" name="Text 14"/>
+          <p:cNvSpPr txBox="1"/>
+          <p:nvPr/>
+        </p:nvSpPr>
+        <p:spPr>
+          <a:xfrm>
+            <a:off x="10424160" y="6355080"/>
+            <a:ext cx="1371600" cy="365760"/>
+          </a:xfrm>
+          <a:prstGeom prst="rect">
+            <a:avLst/>
+          </a:prstGeom>
+          <a:noFill/>
+          <a:ln/>
+        </p:spPr>
+        <p:txBody>
+          <a:bodyPr wrap="square" lIns="0" tIns="0" rIns="0" bIns="0" rtlCol="0" anchor="ctr"/>
+          <a:lstStyle/>
+          <a:p>
+            <a:pPr algn="r" indent="0" marL="0">
+              <a:buNone/>
+            </a:pPr>
+            <a:r>
+              <a:rPr lang="en-US" sz="1100" b="1" dirty="0">
                 <a:solidFill>
                   <a:srgbClr val="003168"/>
                 </a:solidFill>
@@ -3210,48 +3342,9 @@
                 <a:ea typeface="Calibri" pitchFamily="34" charset="-122"/>
                 <a:cs typeface="Calibri" pitchFamily="34" charset="-120"/>
               </a:rPr>
-              <a:t>3</a:t>
-            </a:r>
-            <a:endParaRPr lang="en-US" sz="1200" dirty="0"/>
-          </a:p>
-        </p:txBody>
-      </p:sp>
-      <p:sp>
-        <p:nvSpPr>
-          <p:cNvPr id="18" name="Text 16"/>
-          <p:cNvSpPr txBox="1"/>
-          <p:nvPr/>
-        </p:nvSpPr>
-        <p:spPr>
-          <a:xfrm>
-            <a:off x="10698480" y="6391656"/>
-            <a:ext cx="548640" cy="365760"/>
-          </a:xfrm>
-          <a:prstGeom prst="rect">
-            <a:avLst/>
-          </a:prstGeom>
-          <a:noFill/>
-          <a:ln/>
-        </p:spPr>
-        <p:txBody>
-          <a:bodyPr wrap="square" lIns="0" tIns="0" rIns="0" bIns="0" rtlCol="0" anchor="ctr"/>
-          <a:lstStyle/>
-          <a:p>
-            <a:pPr algn="r" indent="0" marL="0">
-              <a:buNone/>
-            </a:pPr>
-            <a:r>
-              <a:rPr lang="en-US" sz="1000" dirty="0">
-                <a:solidFill>
-                  <a:srgbClr val="6B7280"/>
-                </a:solidFill>
-                <a:latin typeface="Calibri" pitchFamily="34" charset="0"/>
-                <a:ea typeface="Calibri" pitchFamily="34" charset="-122"/>
-                <a:cs typeface="Calibri" pitchFamily="34" charset="-120"/>
-              </a:rPr>
-              <a:t>/ 7</a:t>
-            </a:r>
-            <a:endParaRPr lang="en-US" sz="1000" dirty="0"/>
+              <a:t>3 / 8</a:t>
+            </a:r>
+            <a:endParaRPr lang="en-US" sz="1100" dirty="0"/>
           </a:p>
         </p:txBody>
       </p:sp>
@@ -3296,7 +3389,7 @@
         <p:spPr>
           <a:xfrm>
             <a:off x="548640" y="320040"/>
-            <a:ext cx="4572000" cy="274320"/>
+            <a:ext cx="7315200" cy="274320"/>
           </a:xfrm>
           <a:prstGeom prst="rect">
             <a:avLst/>
@@ -3320,7 +3413,7 @@
                 <a:ea typeface="Calibri" pitchFamily="34" charset="-122"/>
                 <a:cs typeface="Calibri" pitchFamily="34" charset="-120"/>
               </a:rPr>
-              <a:t>RBCCM DIGITAL / EFFICIENCIES</a:t>
+              <a:t>RBCCM DIGITAL / EFFICIENCIES / PROCESSES</a:t>
             </a:r>
             <a:endParaRPr lang="en-US" sz="1000" dirty="0"/>
           </a:p>
@@ -3418,7 +3511,7 @@
                 <a:ea typeface="Cambria" pitchFamily="34" charset="-122"/>
                 <a:cs typeface="Cambria" pitchFamily="34" charset="-120"/>
               </a:rPr>
-              <a:t>Local npm build + one-command deploy.</a:t>
+              <a:t>Local npm build that validates the repo.</a:t>
             </a:r>
             <a:endParaRPr lang="en-US" sz="3000" dirty="0"/>
           </a:p>
@@ -3457,7 +3550,7 @@
                 <a:ea typeface="Calibri" pitchFamily="34" charset="-122"/>
                 <a:cs typeface="Calibri" pitchFamily="34" charset="-120"/>
               </a:rPr>
-              <a:t>SCSS, lint, bundle, and SFTP push, all scripted. Every push logged.</a:t>
+              <a:t>One command lints and checks every component's JS, CSS, XSL and XML before anything goes up.</a:t>
             </a:r>
             <a:endParaRPr lang="en-US" sz="1800" dirty="0"/>
           </a:p>
@@ -3560,7 +3653,7 @@
                 <a:ea typeface="Calibri" pitchFamily="34" charset="-122"/>
                 <a:cs typeface="Calibri" pitchFamily="34" charset="-120"/>
               </a:rPr>
-              <a:t>"Download, edit, upload" tax. Manual errors. "Who changed what?" incidents.</a:t>
+              <a:t>Broken XSL, typos and bad markup found on the live site instead of before upload.</a:t>
             </a:r>
             <a:endParaRPr lang="en-US" sz="1400" dirty="0"/>
           </a:p>
@@ -3766,7 +3859,7 @@
                 <a:ea typeface="Calibri" pitchFamily="34" charset="-122"/>
                 <a:cs typeface="Calibri" pitchFamily="34" charset="-120"/>
               </a:rPr>
-              <a:t>Zero. Same files land at the same paths, just faster and audited.</a:t>
+              <a:t>Zero. It only checks the files; uploading to TeamSite is unchanged.</a:t>
             </a:r>
             <a:endParaRPr lang="en-US" sz="1400" dirty="0"/>
           </a:p>
@@ -3774,50 +3867,30 @@
       </p:sp>
       <p:sp>
         <p:nvSpPr>
-          <p:cNvPr id="16" name="Shape 14"/>
-          <p:cNvSpPr/>
-          <p:nvPr/>
-        </p:nvSpPr>
-        <p:spPr>
-          <a:xfrm>
-            <a:off x="11338560" y="6355080"/>
-            <a:ext cx="457200" cy="457200"/>
-          </a:xfrm>
-          <a:prstGeom prst="ellipse">
-            <a:avLst/>
-          </a:prstGeom>
-          <a:solidFill>
-            <a:srgbClr val="FFC72C"/>
-          </a:solidFill>
-          <a:ln/>
-        </p:spPr>
-      </p:sp>
-      <p:sp>
-        <p:nvSpPr>
-          <p:cNvPr id="17" name="Text 15"/>
-          <p:cNvSpPr txBox="1"/>
-          <p:nvPr/>
-        </p:nvSpPr>
-        <p:spPr>
-          <a:xfrm>
-            <a:off x="11338560" y="6355080"/>
-            <a:ext cx="457200" cy="457200"/>
-          </a:xfrm>
-          <a:prstGeom prst="rect">
-            <a:avLst/>
-          </a:prstGeom>
-          <a:noFill/>
-          <a:ln/>
-        </p:spPr>
-        <p:txBody>
-          <a:bodyPr wrap="square" lIns="0" tIns="0" rIns="0" bIns="0" rtlCol="0" anchor="ctr"/>
-          <a:lstStyle/>
-          <a:p>
-            <a:pPr algn="ctr" indent="0" marL="0">
-              <a:buNone/>
-            </a:pPr>
-            <a:r>
-              <a:rPr lang="en-US" sz="1200" b="1" dirty="0">
+          <p:cNvPr id="16" name="Text 14"/>
+          <p:cNvSpPr txBox="1"/>
+          <p:nvPr/>
+        </p:nvSpPr>
+        <p:spPr>
+          <a:xfrm>
+            <a:off x="10424160" y="6355080"/>
+            <a:ext cx="1371600" cy="365760"/>
+          </a:xfrm>
+          <a:prstGeom prst="rect">
+            <a:avLst/>
+          </a:prstGeom>
+          <a:noFill/>
+          <a:ln/>
+        </p:spPr>
+        <p:txBody>
+          <a:bodyPr wrap="square" lIns="0" tIns="0" rIns="0" bIns="0" rtlCol="0" anchor="ctr"/>
+          <a:lstStyle/>
+          <a:p>
+            <a:pPr algn="r" indent="0" marL="0">
+              <a:buNone/>
+            </a:pPr>
+            <a:r>
+              <a:rPr lang="en-US" sz="1100" b="1" dirty="0">
                 <a:solidFill>
                   <a:srgbClr val="003168"/>
                 </a:solidFill>
@@ -3825,48 +3898,9 @@
                 <a:ea typeface="Calibri" pitchFamily="34" charset="-122"/>
                 <a:cs typeface="Calibri" pitchFamily="34" charset="-120"/>
               </a:rPr>
-              <a:t>4</a:t>
-            </a:r>
-            <a:endParaRPr lang="en-US" sz="1200" dirty="0"/>
-          </a:p>
-        </p:txBody>
-      </p:sp>
-      <p:sp>
-        <p:nvSpPr>
-          <p:cNvPr id="18" name="Text 16"/>
-          <p:cNvSpPr txBox="1"/>
-          <p:nvPr/>
-        </p:nvSpPr>
-        <p:spPr>
-          <a:xfrm>
-            <a:off x="10698480" y="6391656"/>
-            <a:ext cx="548640" cy="365760"/>
-          </a:xfrm>
-          <a:prstGeom prst="rect">
-            <a:avLst/>
-          </a:prstGeom>
-          <a:noFill/>
-          <a:ln/>
-        </p:spPr>
-        <p:txBody>
-          <a:bodyPr wrap="square" lIns="0" tIns="0" rIns="0" bIns="0" rtlCol="0" anchor="ctr"/>
-          <a:lstStyle/>
-          <a:p>
-            <a:pPr algn="r" indent="0" marL="0">
-              <a:buNone/>
-            </a:pPr>
-            <a:r>
-              <a:rPr lang="en-US" sz="1000" dirty="0">
-                <a:solidFill>
-                  <a:srgbClr val="6B7280"/>
-                </a:solidFill>
-                <a:latin typeface="Calibri" pitchFamily="34" charset="0"/>
-                <a:ea typeface="Calibri" pitchFamily="34" charset="-122"/>
-                <a:cs typeface="Calibri" pitchFamily="34" charset="-120"/>
-              </a:rPr>
-              <a:t>/ 7</a:t>
-            </a:r>
-            <a:endParaRPr lang="en-US" sz="1000" dirty="0"/>
+              <a:t>4 / 8</a:t>
+            </a:r>
+            <a:endParaRPr lang="en-US" sz="1100" dirty="0"/>
           </a:p>
         </p:txBody>
       </p:sp>
@@ -3911,7 +3945,7 @@
         <p:spPr>
           <a:xfrm>
             <a:off x="548640" y="320040"/>
-            <a:ext cx="4572000" cy="274320"/>
+            <a:ext cx="7315200" cy="274320"/>
           </a:xfrm>
           <a:prstGeom prst="rect">
             <a:avLst/>
@@ -3935,7 +3969,7 @@
                 <a:ea typeface="Calibri" pitchFamily="34" charset="-122"/>
                 <a:cs typeface="Calibri" pitchFamily="34" charset="-120"/>
               </a:rPr>
-              <a:t>RBCCM DIGITAL / EFFICIENCIES</a:t>
+              <a:t>RBCCM DIGITAL / EFFICIENCIES / PROCESSES</a:t>
             </a:r>
             <a:endParaRPr lang="en-US" sz="1000" dirty="0"/>
           </a:p>
@@ -4033,7 +4067,7 @@
                 <a:ea typeface="Cambria" pitchFamily="34" charset="-122"/>
                 <a:cs typeface="Cambria" pitchFamily="34" charset="-120"/>
               </a:rPr>
-              <a:t>A new modern component library.</a:t>
+              <a:t>An rbccm-* component library.</a:t>
             </a:r>
             <a:endParaRPr lang="en-US" sz="3000" dirty="0"/>
           </a:p>
@@ -4072,7 +4106,7 @@
                 <a:ea typeface="Calibri" pitchFamily="34" charset="-122"/>
                 <a:cs typeface="Calibri" pitchFamily="34" charset="-120"/>
               </a:rPr>
-              <a:t>A browsable catalog of every rbccm-* component with all its variations.</a:t>
+              <a:t>Every Block Element Modifier (BEM) named rbccm-* component with all its variations. A local npm build produces a dev page to check the output is what's expected: variations, FPO content, etc.</a:t>
             </a:r>
             <a:endParaRPr lang="en-US" sz="1800" dirty="0"/>
           </a:p>
@@ -4175,7 +4209,7 @@
                 <a:ea typeface="Calibri" pitchFamily="34" charset="-122"/>
                 <a:cs typeface="Calibri" pitchFamily="34" charset="-120"/>
               </a:rPr>
-              <a:t>The three-carousels pattern. Marketing asking for what already exists.</a:t>
+              <a:t>The three-carousels pattern. Marketing asking for what already exists. Surprises after publishing.</a:t>
             </a:r>
             <a:endParaRPr lang="en-US" sz="1400" dirty="0"/>
           </a:p>
@@ -4278,7 +4312,7 @@
                 <a:ea typeface="Calibri" pitchFamily="34" charset="-122"/>
                 <a:cs typeface="Calibri" pitchFamily="34" charset="-120"/>
               </a:rPr>
-              <a:t>Effort TBD. Delivers visual variations of every component in one place.</a:t>
+              <a:t>Effort TBD. Builds on the component folders and local tests that already exist.</a:t>
             </a:r>
             <a:endParaRPr lang="en-US" sz="1400" dirty="0"/>
           </a:p>
@@ -4381,7 +4415,7 @@
                 <a:ea typeface="Calibri" pitchFamily="34" charset="-122"/>
                 <a:cs typeface="Calibri" pitchFamily="34" charset="-120"/>
               </a:rPr>
-              <a:t>Zero. Lives outside TeamSite as a static reference.</a:t>
+              <a:t>Zero. Runs locally, outside TeamSite.</a:t>
             </a:r>
             <a:endParaRPr lang="en-US" sz="1400" dirty="0"/>
           </a:p>
@@ -4389,50 +4423,30 @@
       </p:sp>
       <p:sp>
         <p:nvSpPr>
-          <p:cNvPr id="16" name="Shape 14"/>
-          <p:cNvSpPr/>
-          <p:nvPr/>
-        </p:nvSpPr>
-        <p:spPr>
-          <a:xfrm>
-            <a:off x="11338560" y="6355080"/>
-            <a:ext cx="457200" cy="457200"/>
-          </a:xfrm>
-          <a:prstGeom prst="ellipse">
-            <a:avLst/>
-          </a:prstGeom>
-          <a:solidFill>
-            <a:srgbClr val="FFC72C"/>
-          </a:solidFill>
-          <a:ln/>
-        </p:spPr>
-      </p:sp>
-      <p:sp>
-        <p:nvSpPr>
-          <p:cNvPr id="17" name="Text 15"/>
-          <p:cNvSpPr txBox="1"/>
-          <p:nvPr/>
-        </p:nvSpPr>
-        <p:spPr>
-          <a:xfrm>
-            <a:off x="11338560" y="6355080"/>
-            <a:ext cx="457200" cy="457200"/>
-          </a:xfrm>
-          <a:prstGeom prst="rect">
-            <a:avLst/>
-          </a:prstGeom>
-          <a:noFill/>
-          <a:ln/>
-        </p:spPr>
-        <p:txBody>
-          <a:bodyPr wrap="square" lIns="0" tIns="0" rIns="0" bIns="0" rtlCol="0" anchor="ctr"/>
-          <a:lstStyle/>
-          <a:p>
-            <a:pPr algn="ctr" indent="0" marL="0">
-              <a:buNone/>
-            </a:pPr>
-            <a:r>
-              <a:rPr lang="en-US" sz="1200" b="1" dirty="0">
+          <p:cNvPr id="16" name="Text 14"/>
+          <p:cNvSpPr txBox="1"/>
+          <p:nvPr/>
+        </p:nvSpPr>
+        <p:spPr>
+          <a:xfrm>
+            <a:off x="10424160" y="6355080"/>
+            <a:ext cx="1371600" cy="365760"/>
+          </a:xfrm>
+          <a:prstGeom prst="rect">
+            <a:avLst/>
+          </a:prstGeom>
+          <a:noFill/>
+          <a:ln/>
+        </p:spPr>
+        <p:txBody>
+          <a:bodyPr wrap="square" lIns="0" tIns="0" rIns="0" bIns="0" rtlCol="0" anchor="ctr"/>
+          <a:lstStyle/>
+          <a:p>
+            <a:pPr algn="r" indent="0" marL="0">
+              <a:buNone/>
+            </a:pPr>
+            <a:r>
+              <a:rPr lang="en-US" sz="1100" b="1" dirty="0">
                 <a:solidFill>
                   <a:srgbClr val="003168"/>
                 </a:solidFill>
@@ -4440,48 +4454,9 @@
                 <a:ea typeface="Calibri" pitchFamily="34" charset="-122"/>
                 <a:cs typeface="Calibri" pitchFamily="34" charset="-120"/>
               </a:rPr>
-              <a:t>5</a:t>
-            </a:r>
-            <a:endParaRPr lang="en-US" sz="1200" dirty="0"/>
-          </a:p>
-        </p:txBody>
-      </p:sp>
-      <p:sp>
-        <p:nvSpPr>
-          <p:cNvPr id="18" name="Text 16"/>
-          <p:cNvSpPr txBox="1"/>
-          <p:nvPr/>
-        </p:nvSpPr>
-        <p:spPr>
-          <a:xfrm>
-            <a:off x="10698480" y="6391656"/>
-            <a:ext cx="548640" cy="365760"/>
-          </a:xfrm>
-          <a:prstGeom prst="rect">
-            <a:avLst/>
-          </a:prstGeom>
-          <a:noFill/>
-          <a:ln/>
-        </p:spPr>
-        <p:txBody>
-          <a:bodyPr wrap="square" lIns="0" tIns="0" rIns="0" bIns="0" rtlCol="0" anchor="ctr"/>
-          <a:lstStyle/>
-          <a:p>
-            <a:pPr algn="r" indent="0" marL="0">
-              <a:buNone/>
-            </a:pPr>
-            <a:r>
-              <a:rPr lang="en-US" sz="1000" dirty="0">
-                <a:solidFill>
-                  <a:srgbClr val="6B7280"/>
-                </a:solidFill>
-                <a:latin typeface="Calibri" pitchFamily="34" charset="0"/>
-                <a:ea typeface="Calibri" pitchFamily="34" charset="-122"/>
-                <a:cs typeface="Calibri" pitchFamily="34" charset="-120"/>
-              </a:rPr>
-              <a:t>/ 7</a:t>
-            </a:r>
-            <a:endParaRPr lang="en-US" sz="1000" dirty="0"/>
+              <a:t>5 / 8</a:t>
+            </a:r>
+            <a:endParaRPr lang="en-US" sz="1100" dirty="0"/>
           </a:p>
         </p:txBody>
       </p:sp>
@@ -4526,7 +4501,7 @@
         <p:spPr>
           <a:xfrm>
             <a:off x="548640" y="320040"/>
-            <a:ext cx="4572000" cy="274320"/>
+            <a:ext cx="7315200" cy="274320"/>
           </a:xfrm>
           <a:prstGeom prst="rect">
             <a:avLst/>
@@ -4550,7 +4525,7 @@
                 <a:ea typeface="Calibri" pitchFamily="34" charset="-122"/>
                 <a:cs typeface="Calibri" pitchFamily="34" charset="-120"/>
               </a:rPr>
-              <a:t>RBCCM DIGITAL / EFFICIENCIES</a:t>
+              <a:t>RBCCM DIGITAL / EFFICIENCIES / PROCESSES</a:t>
             </a:r>
             <a:endParaRPr lang="en-US" sz="1000" dirty="0"/>
           </a:p>
@@ -5004,50 +4979,30 @@
       </p:sp>
       <p:sp>
         <p:nvSpPr>
-          <p:cNvPr id="16" name="Shape 14"/>
-          <p:cNvSpPr/>
-          <p:nvPr/>
-        </p:nvSpPr>
-        <p:spPr>
-          <a:xfrm>
-            <a:off x="11338560" y="6355080"/>
-            <a:ext cx="457200" cy="457200"/>
-          </a:xfrm>
-          <a:prstGeom prst="ellipse">
-            <a:avLst/>
-          </a:prstGeom>
-          <a:solidFill>
-            <a:srgbClr val="FFC72C"/>
-          </a:solidFill>
-          <a:ln/>
-        </p:spPr>
-      </p:sp>
-      <p:sp>
-        <p:nvSpPr>
-          <p:cNvPr id="17" name="Text 15"/>
-          <p:cNvSpPr txBox="1"/>
-          <p:nvPr/>
-        </p:nvSpPr>
-        <p:spPr>
-          <a:xfrm>
-            <a:off x="11338560" y="6355080"/>
-            <a:ext cx="457200" cy="457200"/>
-          </a:xfrm>
-          <a:prstGeom prst="rect">
-            <a:avLst/>
-          </a:prstGeom>
-          <a:noFill/>
-          <a:ln/>
-        </p:spPr>
-        <p:txBody>
-          <a:bodyPr wrap="square" lIns="0" tIns="0" rIns="0" bIns="0" rtlCol="0" anchor="ctr"/>
-          <a:lstStyle/>
-          <a:p>
-            <a:pPr algn="ctr" indent="0" marL="0">
-              <a:buNone/>
-            </a:pPr>
-            <a:r>
-              <a:rPr lang="en-US" sz="1200" b="1" dirty="0">
+          <p:cNvPr id="16" name="Text 14"/>
+          <p:cNvSpPr txBox="1"/>
+          <p:nvPr/>
+        </p:nvSpPr>
+        <p:spPr>
+          <a:xfrm>
+            <a:off x="10424160" y="6355080"/>
+            <a:ext cx="1371600" cy="365760"/>
+          </a:xfrm>
+          <a:prstGeom prst="rect">
+            <a:avLst/>
+          </a:prstGeom>
+          <a:noFill/>
+          <a:ln/>
+        </p:spPr>
+        <p:txBody>
+          <a:bodyPr wrap="square" lIns="0" tIns="0" rIns="0" bIns="0" rtlCol="0" anchor="ctr"/>
+          <a:lstStyle/>
+          <a:p>
+            <a:pPr algn="r" indent="0" marL="0">
+              <a:buNone/>
+            </a:pPr>
+            <a:r>
+              <a:rPr lang="en-US" sz="1100" b="1" dirty="0">
                 <a:solidFill>
                   <a:srgbClr val="003168"/>
                 </a:solidFill>
@@ -5055,48 +5010,9 @@
                 <a:ea typeface="Calibri" pitchFamily="34" charset="-122"/>
                 <a:cs typeface="Calibri" pitchFamily="34" charset="-120"/>
               </a:rPr>
-              <a:t>6</a:t>
-            </a:r>
-            <a:endParaRPr lang="en-US" sz="1200" dirty="0"/>
-          </a:p>
-        </p:txBody>
-      </p:sp>
-      <p:sp>
-        <p:nvSpPr>
-          <p:cNvPr id="18" name="Text 16"/>
-          <p:cNvSpPr txBox="1"/>
-          <p:nvPr/>
-        </p:nvSpPr>
-        <p:spPr>
-          <a:xfrm>
-            <a:off x="10698480" y="6391656"/>
-            <a:ext cx="548640" cy="365760"/>
-          </a:xfrm>
-          <a:prstGeom prst="rect">
-            <a:avLst/>
-          </a:prstGeom>
-          <a:noFill/>
-          <a:ln/>
-        </p:spPr>
-        <p:txBody>
-          <a:bodyPr wrap="square" lIns="0" tIns="0" rIns="0" bIns="0" rtlCol="0" anchor="ctr"/>
-          <a:lstStyle/>
-          <a:p>
-            <a:pPr algn="r" indent="0" marL="0">
-              <a:buNone/>
-            </a:pPr>
-            <a:r>
-              <a:rPr lang="en-US" sz="1000" dirty="0">
-                <a:solidFill>
-                  <a:srgbClr val="6B7280"/>
-                </a:solidFill>
-                <a:latin typeface="Calibri" pitchFamily="34" charset="0"/>
-                <a:ea typeface="Calibri" pitchFamily="34" charset="-122"/>
-                <a:cs typeface="Calibri" pitchFamily="34" charset="-120"/>
-              </a:rPr>
-              <a:t>/ 7</a:t>
-            </a:r>
-            <a:endParaRPr lang="en-US" sz="1000" dirty="0"/>
+              <a:t>6 / 8</a:t>
+            </a:r>
+            <a:endParaRPr lang="en-US" sz="1100" dirty="0"/>
           </a:p>
         </p:txBody>
       </p:sp>
@@ -5141,7 +5057,7 @@
         <p:spPr>
           <a:xfrm>
             <a:off x="548640" y="320040"/>
-            <a:ext cx="4572000" cy="274320"/>
+            <a:ext cx="7315200" cy="274320"/>
           </a:xfrm>
           <a:prstGeom prst="rect">
             <a:avLst/>
@@ -5165,7 +5081,7 @@
                 <a:ea typeface="Calibri" pitchFamily="34" charset="-122"/>
                 <a:cs typeface="Calibri" pitchFamily="34" charset="-120"/>
               </a:rPr>
-              <a:t>RBCCM DIGITAL / EFFICIENCIES</a:t>
+              <a:t>RBCCM DIGITAL / EFFICIENCIES / PROCESSES</a:t>
             </a:r>
             <a:endParaRPr lang="en-US" sz="1000" dirty="0"/>
           </a:p>
@@ -5263,7 +5179,7 @@
                 <a:ea typeface="Cambria" pitchFamily="34" charset="-122"/>
                 <a:cs typeface="Cambria" pitchFamily="34" charset="-120"/>
               </a:rPr>
-              <a:t>Standardized local preview environment.</a:t>
+              <a:t>Localized page preview.</a:t>
             </a:r>
             <a:endParaRPr lang="en-US" sz="3000" dirty="0"/>
           </a:p>
@@ -5302,7 +5218,7 @@
                 <a:ea typeface="Calibri" pitchFamily="34" charset="-122"/>
                 <a:cs typeface="Calibri" pitchFamily="34" charset="-120"/>
               </a:rPr>
-              <a:t>A shared local-test pattern matching TeamSite's runtime. Anyone can iterate offline.</a:t>
+              <a:t>Full pages previewed locally from the #3 component library, matching TeamSite's runtime. Anyone can iterate offline.</a:t>
             </a:r>
             <a:endParaRPr lang="en-US" sz="1800" dirty="0"/>
           </a:p>
@@ -5508,7 +5424,7 @@
                 <a:ea typeface="Calibri" pitchFamily="34" charset="-122"/>
                 <a:cs typeface="Calibri" pitchFamily="34" charset="-120"/>
               </a:rPr>
-              <a:t>Documenting and templating what already works on some components.</a:t>
+              <a:t>Comes out of #3: page templates that assemble library components.</a:t>
             </a:r>
             <a:endParaRPr lang="en-US" sz="1400" dirty="0"/>
           </a:p>
@@ -5611,7 +5527,7 @@
                 <a:ea typeface="Calibri" pitchFamily="34" charset="-122"/>
                 <a:cs typeface="Calibri" pitchFamily="34" charset="-120"/>
               </a:rPr>
-              <a:t>Zero. Runs locally. Only the final artifact touches TeamSite.</a:t>
+              <a:t>Zero. Runs locally. Only the final files touch TeamSite.</a:t>
             </a:r>
             <a:endParaRPr lang="en-US" sz="1400" dirty="0"/>
           </a:p>
@@ -5619,14 +5535,124 @@
       </p:sp>
       <p:sp>
         <p:nvSpPr>
-          <p:cNvPr id="16" name="Shape 14"/>
+          <p:cNvPr id="16" name="Text 14"/>
+          <p:cNvSpPr txBox="1"/>
+          <p:nvPr/>
+        </p:nvSpPr>
+        <p:spPr>
+          <a:xfrm>
+            <a:off x="10424160" y="6355080"/>
+            <a:ext cx="1371600" cy="365760"/>
+          </a:xfrm>
+          <a:prstGeom prst="rect">
+            <a:avLst/>
+          </a:prstGeom>
+          <a:noFill/>
+          <a:ln/>
+        </p:spPr>
+        <p:txBody>
+          <a:bodyPr wrap="square" lIns="0" tIns="0" rIns="0" bIns="0" rtlCol="0" anchor="ctr"/>
+          <a:lstStyle/>
+          <a:p>
+            <a:pPr algn="r" indent="0" marL="0">
+              <a:buNone/>
+            </a:pPr>
+            <a:r>
+              <a:rPr lang="en-US" sz="1100" b="1" dirty="0">
+                <a:solidFill>
+                  <a:srgbClr val="003168"/>
+                </a:solidFill>
+                <a:latin typeface="Calibri" pitchFamily="34" charset="0"/>
+                <a:ea typeface="Calibri" pitchFamily="34" charset="-122"/>
+                <a:cs typeface="Calibri" pitchFamily="34" charset="-120"/>
+              </a:rPr>
+              <a:t>7 / 8</a:t>
+            </a:r>
+            <a:endParaRPr lang="en-US" sz="1100" dirty="0"/>
+          </a:p>
+        </p:txBody>
+      </p:sp>
+    </p:spTree>
+  </p:cSld>
+  <p:clrMapOvr>
+    <a:masterClrMapping/>
+  </p:clrMapOvr>
+</p:sld>
+</file>
+
+<file path=ppt/slides/slide8.xml><?xml version="1.0" encoding="utf-8"?>
+<p:sld xmlns:a="http://schemas.openxmlformats.org/drawingml/2006/main" xmlns:r="http://schemas.openxmlformats.org/officeDocument/2006/relationships" xmlns:p="http://schemas.openxmlformats.org/presentationml/2006/main">
+  <p:cSld name="Slide 8">
+    <p:bg>
+      <p:bgPr>
+        <a:solidFill>
+          <a:srgbClr val="FFFFFF"/>
+        </a:solidFill>
+      </p:bgPr>
+    </p:bg>
+    <p:spTree>
+      <p:nvGrpSpPr>
+        <p:cNvPr id="1" name=""/>
+        <p:cNvGrpSpPr/>
+        <p:nvPr/>
+      </p:nvGrpSpPr>
+      <p:grpSpPr>
+        <a:xfrm>
+          <a:off x="0" y="0"/>
+          <a:ext cx="0" cy="0"/>
+          <a:chOff x="0" y="0"/>
+          <a:chExt cx="0" cy="0"/>
+        </a:xfrm>
+      </p:grpSpPr>
+      <p:sp>
+        <p:nvSpPr>
+          <p:cNvPr id="2" name="Text 0"/>
+          <p:cNvSpPr txBox="1"/>
+          <p:nvPr/>
+        </p:nvSpPr>
+        <p:spPr>
+          <a:xfrm>
+            <a:off x="548640" y="320040"/>
+            <a:ext cx="7315200" cy="274320"/>
+          </a:xfrm>
+          <a:prstGeom prst="rect">
+            <a:avLst/>
+          </a:prstGeom>
+          <a:noFill/>
+          <a:ln/>
+        </p:spPr>
+        <p:txBody>
+          <a:bodyPr wrap="square" lIns="0" tIns="0" rIns="0" bIns="0" rtlCol="0" anchor="ctr"/>
+          <a:lstStyle/>
+          <a:p>
+            <a:pPr indent="0" marL="0">
+              <a:buNone/>
+            </a:pPr>
+            <a:r>
+              <a:rPr lang="en-US" sz="1000" b="1" spc="400" kern="0" dirty="0">
+                <a:solidFill>
+                  <a:srgbClr val="003168"/>
+                </a:solidFill>
+                <a:latin typeface="Calibri" pitchFamily="34" charset="0"/>
+                <a:ea typeface="Calibri" pitchFamily="34" charset="-122"/>
+                <a:cs typeface="Calibri" pitchFamily="34" charset="-120"/>
+              </a:rPr>
+              <a:t>RBCCM DIGITAL / EFFICIENCIES / PROCESSES</a:t>
+            </a:r>
+            <a:endParaRPr lang="en-US" sz="1000" dirty="0"/>
+          </a:p>
+        </p:txBody>
+      </p:sp>
+      <p:sp>
+        <p:nvSpPr>
+          <p:cNvPr id="3" name="Shape 1"/>
           <p:cNvSpPr/>
           <p:nvPr/>
         </p:nvSpPr>
         <p:spPr>
           <a:xfrm>
-            <a:off x="11338560" y="6355080"/>
-            <a:ext cx="457200" cy="457200"/>
+            <a:off x="640080" y="914400"/>
+            <a:ext cx="822960" cy="822960"/>
           </a:xfrm>
           <a:prstGeom prst="ellipse">
             <a:avLst/>
@@ -5639,14 +5665,14 @@
       </p:sp>
       <p:sp>
         <p:nvSpPr>
-          <p:cNvPr id="17" name="Text 15"/>
-          <p:cNvSpPr txBox="1"/>
-          <p:nvPr/>
-        </p:nvSpPr>
-        <p:spPr>
-          <a:xfrm>
-            <a:off x="11338560" y="6355080"/>
-            <a:ext cx="457200" cy="457200"/>
+          <p:cNvPr id="4" name="Text 2"/>
+          <p:cNvSpPr txBox="1"/>
+          <p:nvPr/>
+        </p:nvSpPr>
+        <p:spPr>
+          <a:xfrm>
+            <a:off x="640080" y="914400"/>
+            <a:ext cx="822960" cy="822960"/>
           </a:xfrm>
           <a:prstGeom prst="rect">
             <a:avLst/>
@@ -5662,56 +5688,443 @@
               <a:buNone/>
             </a:pPr>
             <a:r>
-              <a:rPr lang="en-US" sz="1200" b="1" dirty="0">
+              <a:rPr lang="en-US" sz="3000" b="1" dirty="0">
                 <a:solidFill>
                   <a:srgbClr val="003168"/>
+                </a:solidFill>
+                <a:latin typeface="Cambria" pitchFamily="34" charset="0"/>
+                <a:ea typeface="Cambria" pitchFamily="34" charset="-122"/>
+                <a:cs typeface="Cambria" pitchFamily="34" charset="-120"/>
+              </a:rPr>
+              <a:t>6</a:t>
+            </a:r>
+            <a:endParaRPr lang="en-US" sz="3000" dirty="0"/>
+          </a:p>
+        </p:txBody>
+      </p:sp>
+      <p:sp>
+        <p:nvSpPr>
+          <p:cNvPr id="5" name="Text 3"/>
+          <p:cNvSpPr txBox="1"/>
+          <p:nvPr/>
+        </p:nvSpPr>
+        <p:spPr>
+          <a:xfrm>
+            <a:off x="1691640" y="960120"/>
+            <a:ext cx="9601200" cy="777240"/>
+          </a:xfrm>
+          <a:prstGeom prst="rect">
+            <a:avLst/>
+          </a:prstGeom>
+          <a:noFill/>
+          <a:ln/>
+        </p:spPr>
+        <p:txBody>
+          <a:bodyPr wrap="square" lIns="0" tIns="0" rIns="0" bIns="0" rtlCol="0" anchor="ctr"/>
+          <a:lstStyle/>
+          <a:p>
+            <a:pPr indent="0" marL="0">
+              <a:buNone/>
+            </a:pPr>
+            <a:r>
+              <a:rPr lang="en-US" sz="3000" b="1" dirty="0">
+                <a:solidFill>
+                  <a:srgbClr val="003168"/>
+                </a:solidFill>
+                <a:latin typeface="Cambria" pitchFamily="34" charset="0"/>
+                <a:ea typeface="Cambria" pitchFamily="34" charset="-122"/>
+                <a:cs typeface="Cambria" pitchFamily="34" charset="-120"/>
+              </a:rPr>
+              <a:t>No reliance on Bootstrap.</a:t>
+            </a:r>
+            <a:endParaRPr lang="en-US" sz="3000" dirty="0"/>
+          </a:p>
+        </p:txBody>
+      </p:sp>
+      <p:sp>
+        <p:nvSpPr>
+          <p:cNvPr id="6" name="Text 4"/>
+          <p:cNvSpPr txBox="1"/>
+          <p:nvPr/>
+        </p:nvSpPr>
+        <p:spPr>
+          <a:xfrm>
+            <a:off x="640080" y="2011680"/>
+            <a:ext cx="10972800" cy="548640"/>
+          </a:xfrm>
+          <a:prstGeom prst="rect">
+            <a:avLst/>
+          </a:prstGeom>
+          <a:noFill/>
+          <a:ln/>
+        </p:spPr>
+        <p:txBody>
+          <a:bodyPr wrap="square" lIns="0" tIns="0" rIns="0" bIns="0" rtlCol="0" anchor="ctr"/>
+          <a:lstStyle/>
+          <a:p>
+            <a:pPr indent="0" marL="0">
+              <a:buNone/>
+            </a:pPr>
+            <a:r>
+              <a:rPr lang="en-US" sz="1800" i="1" dirty="0">
+                <a:solidFill>
+                  <a:srgbClr val="6B7280"/>
                 </a:solidFill>
                 <a:latin typeface="Calibri" pitchFamily="34" charset="0"/>
                 <a:ea typeface="Calibri" pitchFamily="34" charset="-122"/>
                 <a:cs typeface="Calibri" pitchFamily="34" charset="-120"/>
               </a:rPr>
-              <a:t>7</a:t>
-            </a:r>
-            <a:endParaRPr lang="en-US" sz="1200" dirty="0"/>
-          </a:p>
-        </p:txBody>
-      </p:sp>
-      <p:sp>
-        <p:nvSpPr>
-          <p:cNvPr id="18" name="Text 16"/>
-          <p:cNvSpPr txBox="1"/>
-          <p:nvPr/>
-        </p:nvSpPr>
-        <p:spPr>
-          <a:xfrm>
-            <a:off x="10698480" y="6391656"/>
-            <a:ext cx="548640" cy="365760"/>
-          </a:xfrm>
-          <a:prstGeom prst="rect">
-            <a:avLst/>
-          </a:prstGeom>
-          <a:noFill/>
-          <a:ln/>
-        </p:spPr>
-        <p:txBody>
-          <a:bodyPr wrap="square" lIns="0" tIns="0" rIns="0" bIns="0" rtlCol="0" anchor="ctr"/>
-          <a:lstStyle/>
-          <a:p>
-            <a:pPr algn="r" indent="0" marL="0">
-              <a:buNone/>
-            </a:pPr>
-            <a:r>
-              <a:rPr lang="en-US" sz="1000" dirty="0">
-                <a:solidFill>
-                  <a:srgbClr val="6B7280"/>
+              <a:t>Our design system, 1:1 with the Figma expectation. Every component styled in its own SCSS instead of loading a whole library for utility classes. Atomic design principles, 100% accurate.</a:t>
+            </a:r>
+            <a:endParaRPr lang="en-US" sz="1800" dirty="0"/>
+          </a:p>
+        </p:txBody>
+      </p:sp>
+      <p:sp>
+        <p:nvSpPr>
+          <p:cNvPr id="7" name="Shape 5"/>
+          <p:cNvSpPr/>
+          <p:nvPr/>
+        </p:nvSpPr>
+        <p:spPr>
+          <a:xfrm>
+            <a:off x="640080" y="3017520"/>
+            <a:ext cx="10908792" cy="914400"/>
+          </a:xfrm>
+          <a:prstGeom prst="rect">
+            <a:avLst/>
+          </a:prstGeom>
+          <a:solidFill>
+            <a:srgbClr val="F9FAFB"/>
+          </a:solidFill>
+          <a:ln w="12700">
+            <a:solidFill>
+              <a:srgbClr val="E5E7EB"/>
+            </a:solidFill>
+            <a:prstDash val="solid"/>
+          </a:ln>
+        </p:spPr>
+      </p:sp>
+      <p:sp>
+        <p:nvSpPr>
+          <p:cNvPr id="8" name="Text 6"/>
+          <p:cNvSpPr txBox="1"/>
+          <p:nvPr/>
+        </p:nvSpPr>
+        <p:spPr>
+          <a:xfrm>
+            <a:off x="914400" y="3154680"/>
+            <a:ext cx="2743200" cy="320040"/>
+          </a:xfrm>
+          <a:prstGeom prst="rect">
+            <a:avLst/>
+          </a:prstGeom>
+          <a:noFill/>
+          <a:ln/>
+        </p:spPr>
+        <p:txBody>
+          <a:bodyPr wrap="square" lIns="0" tIns="0" rIns="0" bIns="0" rtlCol="0" anchor="ctr"/>
+          <a:lstStyle/>
+          <a:p>
+            <a:pPr indent="0" marL="0">
+              <a:buNone/>
+            </a:pPr>
+            <a:r>
+              <a:rPr lang="en-US" sz="1000" b="1" spc="400" kern="0" dirty="0">
+                <a:solidFill>
+                  <a:srgbClr val="003168"/>
                 </a:solidFill>
                 <a:latin typeface="Calibri" pitchFamily="34" charset="0"/>
                 <a:ea typeface="Calibri" pitchFamily="34" charset="-122"/>
                 <a:cs typeface="Calibri" pitchFamily="34" charset="-120"/>
               </a:rPr>
-              <a:t>/ 7</a:t>
+              <a:t>WHAT IT FIXES</a:t>
             </a:r>
             <a:endParaRPr lang="en-US" sz="1000" dirty="0"/>
+          </a:p>
+        </p:txBody>
+      </p:sp>
+      <p:sp>
+        <p:nvSpPr>
+          <p:cNvPr id="9" name="Text 7"/>
+          <p:cNvSpPr txBox="1"/>
+          <p:nvPr/>
+        </p:nvSpPr>
+        <p:spPr>
+          <a:xfrm>
+            <a:off x="3749040" y="3154680"/>
+            <a:ext cx="7772400" cy="640080"/>
+          </a:xfrm>
+          <a:prstGeom prst="rect">
+            <a:avLst/>
+          </a:prstGeom>
+          <a:noFill/>
+          <a:ln/>
+        </p:spPr>
+        <p:txBody>
+          <a:bodyPr wrap="square" lIns="0" tIns="0" rIns="0" bIns="0" rtlCol="0" anchor="t"/>
+          <a:lstStyle/>
+          <a:p>
+            <a:pPr indent="0" marL="0">
+              <a:buNone/>
+            </a:pPr>
+            <a:r>
+              <a:rPr lang="en-US" sz="1400" dirty="0">
+                <a:solidFill>
+                  <a:srgbClr val="1A1A1A"/>
+                </a:solidFill>
+                <a:latin typeface="Calibri" pitchFamily="34" charset="0"/>
+                <a:ea typeface="Calibri" pitchFamily="34" charset="-122"/>
+                <a:cs typeface="Calibri" pitchFamily="34" charset="-120"/>
+              </a:rPr>
+              <a:t>Every page loading all of Bootstrap for a handful of utilities. Fighting framework defaults to match the design.</a:t>
+            </a:r>
+            <a:endParaRPr lang="en-US" sz="1400" dirty="0"/>
+          </a:p>
+        </p:txBody>
+      </p:sp>
+      <p:sp>
+        <p:nvSpPr>
+          <p:cNvPr id="10" name="Shape 8"/>
+          <p:cNvSpPr/>
+          <p:nvPr/>
+        </p:nvSpPr>
+        <p:spPr>
+          <a:xfrm>
+            <a:off x="640080" y="4069080"/>
+            <a:ext cx="10908792" cy="914400"/>
+          </a:xfrm>
+          <a:prstGeom prst="rect">
+            <a:avLst/>
+          </a:prstGeom>
+          <a:solidFill>
+            <a:srgbClr val="F9FAFB"/>
+          </a:solidFill>
+          <a:ln w="12700">
+            <a:solidFill>
+              <a:srgbClr val="E5E7EB"/>
+            </a:solidFill>
+            <a:prstDash val="solid"/>
+          </a:ln>
+        </p:spPr>
+      </p:sp>
+      <p:sp>
+        <p:nvSpPr>
+          <p:cNvPr id="11" name="Text 9"/>
+          <p:cNvSpPr txBox="1"/>
+          <p:nvPr/>
+        </p:nvSpPr>
+        <p:spPr>
+          <a:xfrm>
+            <a:off x="914400" y="4206240"/>
+            <a:ext cx="2743200" cy="320040"/>
+          </a:xfrm>
+          <a:prstGeom prst="rect">
+            <a:avLst/>
+          </a:prstGeom>
+          <a:noFill/>
+          <a:ln/>
+        </p:spPr>
+        <p:txBody>
+          <a:bodyPr wrap="square" lIns="0" tIns="0" rIns="0" bIns="0" rtlCol="0" anchor="ctr"/>
+          <a:lstStyle/>
+          <a:p>
+            <a:pPr indent="0" marL="0">
+              <a:buNone/>
+            </a:pPr>
+            <a:r>
+              <a:rPr lang="en-US" sz="1000" b="1" spc="400" kern="0" dirty="0">
+                <a:solidFill>
+                  <a:srgbClr val="003168"/>
+                </a:solidFill>
+                <a:latin typeface="Calibri" pitchFamily="34" charset="0"/>
+                <a:ea typeface="Calibri" pitchFamily="34" charset="-122"/>
+                <a:cs typeface="Calibri" pitchFamily="34" charset="-120"/>
+              </a:rPr>
+              <a:t>COST TO TRY</a:t>
+            </a:r>
+            <a:endParaRPr lang="en-US" sz="1000" dirty="0"/>
+          </a:p>
+        </p:txBody>
+      </p:sp>
+      <p:sp>
+        <p:nvSpPr>
+          <p:cNvPr id="12" name="Text 10"/>
+          <p:cNvSpPr txBox="1"/>
+          <p:nvPr/>
+        </p:nvSpPr>
+        <p:spPr>
+          <a:xfrm>
+            <a:off x="3749040" y="4206240"/>
+            <a:ext cx="7772400" cy="640080"/>
+          </a:xfrm>
+          <a:prstGeom prst="rect">
+            <a:avLst/>
+          </a:prstGeom>
+          <a:noFill/>
+          <a:ln/>
+        </p:spPr>
+        <p:txBody>
+          <a:bodyPr wrap="square" lIns="0" tIns="0" rIns="0" bIns="0" rtlCol="0" anchor="t"/>
+          <a:lstStyle/>
+          <a:p>
+            <a:pPr indent="0" marL="0">
+              <a:buNone/>
+            </a:pPr>
+            <a:r>
+              <a:rPr lang="en-US" sz="1400" dirty="0">
+                <a:solidFill>
+                  <a:srgbClr val="1A1A1A"/>
+                </a:solidFill>
+                <a:latin typeface="Calibri" pitchFamily="34" charset="0"/>
+                <a:ea typeface="Calibri" pitchFamily="34" charset="-122"/>
+                <a:cs typeface="Calibri" pitchFamily="34" charset="-120"/>
+              </a:rPr>
+              <a:t>In progress now. New components already ship their own CSS; older pages move over as they're rebuilt. Pairs with #4.</a:t>
+            </a:r>
+            <a:endParaRPr lang="en-US" sz="1400" dirty="0"/>
+          </a:p>
+        </p:txBody>
+      </p:sp>
+      <p:sp>
+        <p:nvSpPr>
+          <p:cNvPr id="13" name="Shape 11"/>
+          <p:cNvSpPr/>
+          <p:nvPr/>
+        </p:nvSpPr>
+        <p:spPr>
+          <a:xfrm>
+            <a:off x="640080" y="5120640"/>
+            <a:ext cx="10908792" cy="914400"/>
+          </a:xfrm>
+          <a:prstGeom prst="rect">
+            <a:avLst/>
+          </a:prstGeom>
+          <a:solidFill>
+            <a:srgbClr val="F9FAFB"/>
+          </a:solidFill>
+          <a:ln w="12700">
+            <a:solidFill>
+              <a:srgbClr val="E5E7EB"/>
+            </a:solidFill>
+            <a:prstDash val="solid"/>
+          </a:ln>
+        </p:spPr>
+      </p:sp>
+      <p:sp>
+        <p:nvSpPr>
+          <p:cNvPr id="14" name="Text 12"/>
+          <p:cNvSpPr txBox="1"/>
+          <p:nvPr/>
+        </p:nvSpPr>
+        <p:spPr>
+          <a:xfrm>
+            <a:off x="914400" y="5257800"/>
+            <a:ext cx="2743200" cy="320040"/>
+          </a:xfrm>
+          <a:prstGeom prst="rect">
+            <a:avLst/>
+          </a:prstGeom>
+          <a:noFill/>
+          <a:ln/>
+        </p:spPr>
+        <p:txBody>
+          <a:bodyPr wrap="square" lIns="0" tIns="0" rIns="0" bIns="0" rtlCol="0" anchor="ctr"/>
+          <a:lstStyle/>
+          <a:p>
+            <a:pPr indent="0" marL="0">
+              <a:buNone/>
+            </a:pPr>
+            <a:r>
+              <a:rPr lang="en-US" sz="1000" b="1" spc="400" kern="0" dirty="0">
+                <a:solidFill>
+                  <a:srgbClr val="003168"/>
+                </a:solidFill>
+                <a:latin typeface="Calibri" pitchFamily="34" charset="0"/>
+                <a:ea typeface="Calibri" pitchFamily="34" charset="-122"/>
+                <a:cs typeface="Calibri" pitchFamily="34" charset="-120"/>
+              </a:rPr>
+              <a:t>TEAMSITE IMPACT</a:t>
+            </a:r>
+            <a:endParaRPr lang="en-US" sz="1000" dirty="0"/>
+          </a:p>
+        </p:txBody>
+      </p:sp>
+      <p:sp>
+        <p:nvSpPr>
+          <p:cNvPr id="15" name="Text 13"/>
+          <p:cNvSpPr txBox="1"/>
+          <p:nvPr/>
+        </p:nvSpPr>
+        <p:spPr>
+          <a:xfrm>
+            <a:off x="3749040" y="5257800"/>
+            <a:ext cx="7772400" cy="640080"/>
+          </a:xfrm>
+          <a:prstGeom prst="rect">
+            <a:avLst/>
+          </a:prstGeom>
+          <a:noFill/>
+          <a:ln/>
+        </p:spPr>
+        <p:txBody>
+          <a:bodyPr wrap="square" lIns="0" tIns="0" rIns="0" bIns="0" rtlCol="0" anchor="t"/>
+          <a:lstStyle/>
+          <a:p>
+            <a:pPr indent="0" marL="0">
+              <a:buNone/>
+            </a:pPr>
+            <a:r>
+              <a:rPr lang="en-US" sz="1400" dirty="0">
+                <a:solidFill>
+                  <a:srgbClr val="1A1A1A"/>
+                </a:solidFill>
+                <a:latin typeface="Calibri" pitchFamily="34" charset="0"/>
+                <a:ea typeface="Calibri" pitchFamily="34" charset="-122"/>
+                <a:cs typeface="Calibri" pitchFamily="34" charset="-120"/>
+              </a:rPr>
+              <a:t>Zero. Future-proofs the rendered output: if the CMS changes, only the templates (PHP, React, etc.) need updating, not the styles.</a:t>
+            </a:r>
+            <a:endParaRPr lang="en-US" sz="1400" dirty="0"/>
+          </a:p>
+        </p:txBody>
+      </p:sp>
+      <p:sp>
+        <p:nvSpPr>
+          <p:cNvPr id="16" name="Text 14"/>
+          <p:cNvSpPr txBox="1"/>
+          <p:nvPr/>
+        </p:nvSpPr>
+        <p:spPr>
+          <a:xfrm>
+            <a:off x="10424160" y="6355080"/>
+            <a:ext cx="1371600" cy="365760"/>
+          </a:xfrm>
+          <a:prstGeom prst="rect">
+            <a:avLst/>
+          </a:prstGeom>
+          <a:noFill/>
+          <a:ln/>
+        </p:spPr>
+        <p:txBody>
+          <a:bodyPr wrap="square" lIns="0" tIns="0" rIns="0" bIns="0" rtlCol="0" anchor="ctr"/>
+          <a:lstStyle/>
+          <a:p>
+            <a:pPr algn="r" indent="0" marL="0">
+              <a:buNone/>
+            </a:pPr>
+            <a:r>
+              <a:rPr lang="en-US" sz="1100" b="1" dirty="0">
+                <a:solidFill>
+                  <a:srgbClr val="003168"/>
+                </a:solidFill>
+                <a:latin typeface="Calibri" pitchFamily="34" charset="0"/>
+                <a:ea typeface="Calibri" pitchFamily="34" charset="-122"/>
+                <a:cs typeface="Calibri" pitchFamily="34" charset="-120"/>
+              </a:rPr>
+              <a:t>8 / 8</a:t>
+            </a:r>
+            <a:endParaRPr lang="en-US" sz="1100" dirty="0"/>
           </a:p>
         </p:txBody>
       </p:sp>
